--- a/第一週_AI.課堂規定及評量標準.pptx
+++ b/第一週_AI.課堂規定及評量標準.pptx
@@ -204,7 +204,7 @@
           <a:p>
             <a:fld id="{31A8676C-D457-4A0B-9C91-83939419494E}" type="datetimeFigureOut">
               <a:rPr lang="zh-TW" altLang="en-US" smtClean="0"/>
-              <a:t>2025/9/11</a:t>
+              <a:t>2025/9/12</a:t>
             </a:fld>
             <a:endParaRPr lang="zh-TW" altLang="en-US"/>
           </a:p>
@@ -692,7 +692,7 @@
           <a:p>
             <a:fld id="{6930F9A4-4469-4216-8732-74830AAB3356}" type="datetimeFigureOut">
               <a:rPr lang="zh-TW" altLang="en-US" smtClean="0"/>
-              <a:t>2025/9/11</a:t>
+              <a:t>2025/9/12</a:t>
             </a:fld>
             <a:endParaRPr lang="zh-TW" altLang="en-US"/>
           </a:p>
@@ -862,7 +862,7 @@
           <a:p>
             <a:fld id="{6930F9A4-4469-4216-8732-74830AAB3356}" type="datetimeFigureOut">
               <a:rPr lang="zh-TW" altLang="en-US" smtClean="0"/>
-              <a:t>2025/9/11</a:t>
+              <a:t>2025/9/12</a:t>
             </a:fld>
             <a:endParaRPr lang="zh-TW" altLang="en-US"/>
           </a:p>
@@ -1042,7 +1042,7 @@
           <a:p>
             <a:fld id="{6930F9A4-4469-4216-8732-74830AAB3356}" type="datetimeFigureOut">
               <a:rPr lang="zh-TW" altLang="en-US" smtClean="0"/>
-              <a:t>2025/9/11</a:t>
+              <a:t>2025/9/12</a:t>
             </a:fld>
             <a:endParaRPr lang="zh-TW" altLang="en-US"/>
           </a:p>
@@ -1212,7 +1212,7 @@
           <a:p>
             <a:fld id="{6930F9A4-4469-4216-8732-74830AAB3356}" type="datetimeFigureOut">
               <a:rPr lang="zh-TW" altLang="en-US" smtClean="0"/>
-              <a:t>2025/9/11</a:t>
+              <a:t>2025/9/12</a:t>
             </a:fld>
             <a:endParaRPr lang="zh-TW" altLang="en-US"/>
           </a:p>
@@ -1458,7 +1458,7 @@
           <a:p>
             <a:fld id="{6930F9A4-4469-4216-8732-74830AAB3356}" type="datetimeFigureOut">
               <a:rPr lang="zh-TW" altLang="en-US" smtClean="0"/>
-              <a:t>2025/9/11</a:t>
+              <a:t>2025/9/12</a:t>
             </a:fld>
             <a:endParaRPr lang="zh-TW" altLang="en-US"/>
           </a:p>
@@ -1690,7 +1690,7 @@
           <a:p>
             <a:fld id="{6930F9A4-4469-4216-8732-74830AAB3356}" type="datetimeFigureOut">
               <a:rPr lang="zh-TW" altLang="en-US" smtClean="0"/>
-              <a:t>2025/9/11</a:t>
+              <a:t>2025/9/12</a:t>
             </a:fld>
             <a:endParaRPr lang="zh-TW" altLang="en-US"/>
           </a:p>
@@ -2057,7 +2057,7 @@
           <a:p>
             <a:fld id="{6930F9A4-4469-4216-8732-74830AAB3356}" type="datetimeFigureOut">
               <a:rPr lang="zh-TW" altLang="en-US" smtClean="0"/>
-              <a:t>2025/9/11</a:t>
+              <a:t>2025/9/12</a:t>
             </a:fld>
             <a:endParaRPr lang="zh-TW" altLang="en-US"/>
           </a:p>
@@ -2175,7 +2175,7 @@
           <a:p>
             <a:fld id="{6930F9A4-4469-4216-8732-74830AAB3356}" type="datetimeFigureOut">
               <a:rPr lang="zh-TW" altLang="en-US" smtClean="0"/>
-              <a:t>2025/9/11</a:t>
+              <a:t>2025/9/12</a:t>
             </a:fld>
             <a:endParaRPr lang="zh-TW" altLang="en-US"/>
           </a:p>
@@ -2270,7 +2270,7 @@
           <a:p>
             <a:fld id="{6930F9A4-4469-4216-8732-74830AAB3356}" type="datetimeFigureOut">
               <a:rPr lang="zh-TW" altLang="en-US" smtClean="0"/>
-              <a:t>2025/9/11</a:t>
+              <a:t>2025/9/12</a:t>
             </a:fld>
             <a:endParaRPr lang="zh-TW" altLang="en-US"/>
           </a:p>
@@ -2547,7 +2547,7 @@
           <a:p>
             <a:fld id="{6930F9A4-4469-4216-8732-74830AAB3356}" type="datetimeFigureOut">
               <a:rPr lang="zh-TW" altLang="en-US" smtClean="0"/>
-              <a:t>2025/9/11</a:t>
+              <a:t>2025/9/12</a:t>
             </a:fld>
             <a:endParaRPr lang="zh-TW" altLang="en-US"/>
           </a:p>
@@ -2800,7 +2800,7 @@
           <a:p>
             <a:fld id="{6930F9A4-4469-4216-8732-74830AAB3356}" type="datetimeFigureOut">
               <a:rPr lang="zh-TW" altLang="en-US" smtClean="0"/>
-              <a:t>2025/9/11</a:t>
+              <a:t>2025/9/12</a:t>
             </a:fld>
             <a:endParaRPr lang="zh-TW" altLang="en-US"/>
           </a:p>
@@ -3013,7 +3013,7 @@
           <a:p>
             <a:fld id="{6930F9A4-4469-4216-8732-74830AAB3356}" type="datetimeFigureOut">
               <a:rPr lang="zh-TW" altLang="en-US" smtClean="0"/>
-              <a:t>2025/9/11</a:t>
+              <a:t>2025/9/12</a:t>
             </a:fld>
             <a:endParaRPr lang="zh-TW" altLang="en-US"/>
           </a:p>
@@ -3543,17 +3543,7 @@
                 <a:latin typeface="標楷體" panose="03000509000000000000" pitchFamily="65" charset="-120"/>
                 <a:ea typeface="標楷體" panose="03000509000000000000" pitchFamily="65" charset="-120"/>
               </a:rPr>
-              <a:t>學年</a:t>
-            </a:r>
-            <a:r>
-              <a:rPr lang="zh-TW" altLang="en-US" sz="2800" dirty="0" smtClean="0">
-                <a:solidFill>
-                  <a:srgbClr val="FF0000"/>
-                </a:solidFill>
-                <a:latin typeface="標楷體" panose="03000509000000000000" pitchFamily="65" charset="-120"/>
-                <a:ea typeface="標楷體" panose="03000509000000000000" pitchFamily="65" charset="-120"/>
-              </a:rPr>
-              <a:t>上學期</a:t>
+              <a:t>學年上學期</a:t>
             </a:r>
             <a:r>
               <a:rPr lang="en-US" altLang="zh-TW" sz="2800" dirty="0" smtClean="0">
@@ -4105,7 +4095,7 @@
                   <a:latin typeface="標楷體" panose="03000509000000000000" pitchFamily="65" charset="-120"/>
                   <a:ea typeface="標楷體" panose="03000509000000000000" pitchFamily="65" charset="-120"/>
                 </a:rPr>
-                <a:t>期末報告</a:t>
+                <a:t>期末期刊報告</a:t>
               </a:r>
               <a:r>
                 <a:rPr lang="en-US" altLang="zh-TW" sz="2400" dirty="0" smtClean="0">
@@ -4115,17 +4105,7 @@
                   <a:latin typeface="標楷體" panose="03000509000000000000" pitchFamily="65" charset="-120"/>
                   <a:ea typeface="標楷體" panose="03000509000000000000" pitchFamily="65" charset="-120"/>
                 </a:rPr>
-                <a:t>Paper25</a:t>
-              </a:r>
-              <a:r>
-                <a:rPr lang="en-US" altLang="zh-TW" sz="2400" dirty="0" smtClean="0">
-                  <a:solidFill>
-                    <a:srgbClr val="FF0000"/>
-                  </a:solidFill>
-                  <a:latin typeface="標楷體" panose="03000509000000000000" pitchFamily="65" charset="-120"/>
-                  <a:ea typeface="標楷體" panose="03000509000000000000" pitchFamily="65" charset="-120"/>
-                </a:rPr>
-                <a:t>%</a:t>
+                <a:t>Paper25%</a:t>
               </a:r>
               <a:endParaRPr lang="zh-TW" altLang="en-US" sz="2400" dirty="0">
                 <a:solidFill>
@@ -4186,14 +4166,14 @@
                 <a:t>期中</a:t>
               </a:r>
               <a:r>
-                <a:rPr lang="en-US" altLang="zh-TW" sz="2400" dirty="0" smtClean="0">
+                <a:rPr lang="en-US" altLang="zh-TW" sz="2400" dirty="0" err="1" smtClean="0">
                   <a:solidFill>
                     <a:srgbClr val="FF0000"/>
                   </a:solidFill>
                   <a:latin typeface="標楷體" panose="03000509000000000000" pitchFamily="65" charset="-120"/>
                   <a:ea typeface="標楷體" panose="03000509000000000000" pitchFamily="65" charset="-120"/>
                 </a:rPr>
-                <a:t>P</a:t>
+                <a:t>YoLo</a:t>
               </a:r>
               <a:r>
                 <a:rPr lang="en-US" altLang="zh-TW" sz="2400" dirty="0" smtClean="0">
@@ -4203,7 +4183,26 @@
                   <a:latin typeface="標楷體" panose="03000509000000000000" pitchFamily="65" charset="-120"/>
                   <a:ea typeface="標楷體" panose="03000509000000000000" pitchFamily="65" charset="-120"/>
                 </a:rPr>
-                <a:t>ython</a:t>
+                <a:t/>
+              </a:r>
+              <a:br>
+                <a:rPr lang="en-US" altLang="zh-TW" sz="2400" dirty="0" smtClean="0">
+                  <a:solidFill>
+                    <a:srgbClr val="FF0000"/>
+                  </a:solidFill>
+                  <a:latin typeface="標楷體" panose="03000509000000000000" pitchFamily="65" charset="-120"/>
+                  <a:ea typeface="標楷體" panose="03000509000000000000" pitchFamily="65" charset="-120"/>
+                </a:rPr>
+              </a:br>
+              <a:r>
+                <a:rPr lang="zh-TW" altLang="en-US" sz="2400" dirty="0" smtClean="0">
+                  <a:solidFill>
+                    <a:srgbClr val="FF0000"/>
+                  </a:solidFill>
+                  <a:latin typeface="標楷體" panose="03000509000000000000" pitchFamily="65" charset="-120"/>
+                  <a:ea typeface="標楷體" panose="03000509000000000000" pitchFamily="65" charset="-120"/>
+                </a:rPr>
+                <a:t>實</a:t>
               </a:r>
               <a:r>
                 <a:rPr lang="zh-TW" altLang="en-US" sz="2400" dirty="0" smtClean="0">
@@ -4213,7 +4212,7 @@
                   <a:latin typeface="標楷體" panose="03000509000000000000" pitchFamily="65" charset="-120"/>
                   <a:ea typeface="標楷體" panose="03000509000000000000" pitchFamily="65" charset="-120"/>
                 </a:rPr>
-                <a:t>實作</a:t>
+                <a:t>作</a:t>
               </a:r>
               <a:r>
                 <a:rPr lang="en-US" altLang="zh-TW" sz="2400" dirty="0" smtClean="0">
@@ -4223,17 +4222,7 @@
                   <a:latin typeface="標楷體" panose="03000509000000000000" pitchFamily="65" charset="-120"/>
                   <a:ea typeface="標楷體" panose="03000509000000000000" pitchFamily="65" charset="-120"/>
                 </a:rPr>
-                <a:t>25</a:t>
-              </a:r>
-              <a:r>
-                <a:rPr lang="en-US" altLang="zh-TW" sz="2400" dirty="0" smtClean="0">
-                  <a:solidFill>
-                    <a:srgbClr val="FF0000"/>
-                  </a:solidFill>
-                  <a:latin typeface="標楷體" panose="03000509000000000000" pitchFamily="65" charset="-120"/>
-                  <a:ea typeface="標楷體" panose="03000509000000000000" pitchFamily="65" charset="-120"/>
-                </a:rPr>
-                <a:t>%</a:t>
+                <a:t>25%</a:t>
               </a:r>
               <a:endParaRPr lang="zh-TW" altLang="en-US" sz="2400" dirty="0">
                 <a:solidFill>
@@ -6689,7 +6678,7 @@
         </p:spPr>
         <p:txBody>
           <a:bodyPr>
-            <a:normAutofit fontScale="92500" lnSpcReduction="20000"/>
+            <a:normAutofit fontScale="70000" lnSpcReduction="20000"/>
           </a:bodyPr>
           <a:lstStyle/>
           <a:p>
@@ -6793,14 +6782,7 @@
                 <a:latin typeface="標楷體" panose="03000509000000000000" pitchFamily="65" charset="-120"/>
                 <a:ea typeface="標楷體" panose="03000509000000000000" pitchFamily="65" charset="-120"/>
               </a:rPr>
-              <a:t> </a:t>
-            </a:r>
-            <a:r>
-              <a:rPr lang="en-US" altLang="zh-TW" dirty="0" smtClean="0">
-                <a:latin typeface="標楷體" panose="03000509000000000000" pitchFamily="65" charset="-120"/>
-                <a:ea typeface="標楷體" panose="03000509000000000000" pitchFamily="65" charset="-120"/>
-              </a:rPr>
-              <a:t>(Visual Studio Code)</a:t>
+              <a:t> (Visual Studio Code)</a:t>
             </a:r>
             <a:r>
               <a:rPr lang="zh-TW" altLang="en-US" dirty="0" smtClean="0">
@@ -7030,6 +7012,107 @@
           </a:p>
           <a:p>
             <a:pPr lvl="1"/>
+            <a:endParaRPr lang="en-US" altLang="zh-TW" dirty="0" smtClean="0">
+              <a:latin typeface="標楷體" panose="03000509000000000000" pitchFamily="65" charset="-120"/>
+              <a:ea typeface="標楷體" panose="03000509000000000000" pitchFamily="65" charset="-120"/>
+            </a:endParaRPr>
+          </a:p>
+          <a:p>
+            <a:r>
+              <a:rPr lang="en-US" altLang="zh-TW" dirty="0" smtClean="0">
+                <a:solidFill>
+                  <a:srgbClr val="0000FF"/>
+                </a:solidFill>
+                <a:latin typeface="標楷體" panose="03000509000000000000" pitchFamily="65" charset="-120"/>
+                <a:ea typeface="標楷體" panose="03000509000000000000" pitchFamily="65" charset="-120"/>
+              </a:rPr>
+              <a:t>A.</a:t>
+            </a:r>
+            <a:r>
+              <a:rPr lang="zh-TW" altLang="en-US" dirty="0" smtClean="0">
+                <a:solidFill>
+                  <a:srgbClr val="0000FF"/>
+                </a:solidFill>
+                <a:latin typeface="標楷體" panose="03000509000000000000" pitchFamily="65" charset="-120"/>
+                <a:ea typeface="標楷體" panose="03000509000000000000" pitchFamily="65" charset="-120"/>
+              </a:rPr>
+              <a:t>熟悉各種平台</a:t>
+            </a:r>
+            <a:r>
+              <a:rPr lang="zh-TW" altLang="en-US" sz="2900" dirty="0">
+                <a:solidFill>
+                  <a:srgbClr val="0000FF"/>
+                </a:solidFill>
+                <a:latin typeface="標楷體" panose="03000509000000000000" pitchFamily="65" charset="-120"/>
+                <a:ea typeface="標楷體" panose="03000509000000000000" pitchFamily="65" charset="-120"/>
+              </a:rPr>
+              <a:t>、編輯軟體、</a:t>
+            </a:r>
+            <a:r>
+              <a:rPr lang="zh-TW" altLang="en-US" sz="2900" dirty="0" smtClean="0">
+                <a:solidFill>
+                  <a:srgbClr val="0000FF"/>
+                </a:solidFill>
+                <a:latin typeface="標楷體" panose="03000509000000000000" pitchFamily="65" charset="-120"/>
+                <a:ea typeface="標楷體" panose="03000509000000000000" pitchFamily="65" charset="-120"/>
+              </a:rPr>
+              <a:t>模型 </a:t>
+            </a:r>
+            <a:r>
+              <a:rPr lang="zh-TW" altLang="en-US" sz="2900" dirty="0">
+                <a:solidFill>
+                  <a:srgbClr val="0000FF"/>
+                </a:solidFill>
+                <a:latin typeface="標楷體" panose="03000509000000000000" pitchFamily="65" charset="-120"/>
+                <a:ea typeface="標楷體" panose="03000509000000000000" pitchFamily="65" charset="-120"/>
+              </a:rPr>
+              <a:t>、套件，及其安裝</a:t>
+            </a:r>
+            <a:endParaRPr lang="en-US" altLang="zh-TW" sz="2900" dirty="0">
+              <a:solidFill>
+                <a:srgbClr val="0000FF"/>
+              </a:solidFill>
+              <a:latin typeface="標楷體" panose="03000509000000000000" pitchFamily="65" charset="-120"/>
+              <a:ea typeface="標楷體" panose="03000509000000000000" pitchFamily="65" charset="-120"/>
+            </a:endParaRPr>
+          </a:p>
+          <a:p>
+            <a:pPr lvl="1"/>
+            <a:r>
+              <a:rPr lang="en-US" altLang="zh-TW" dirty="0">
+                <a:latin typeface="標楷體" panose="03000509000000000000" pitchFamily="65" charset="-120"/>
+                <a:ea typeface="標楷體" panose="03000509000000000000" pitchFamily="65" charset="-120"/>
+              </a:rPr>
+              <a:t>Windows +</a:t>
+            </a:r>
+            <a:r>
+              <a:rPr lang="en-US" altLang="zh-TW" dirty="0">
+                <a:latin typeface="標楷體" panose="03000509000000000000" pitchFamily="65" charset="-120"/>
+                <a:ea typeface="標楷體" panose="03000509000000000000" pitchFamily="65" charset="-120"/>
+              </a:rPr>
+              <a:t> </a:t>
+            </a:r>
+            <a:r>
+              <a:rPr lang="en-US" altLang="zh-TW" dirty="0" smtClean="0">
+                <a:latin typeface="標楷體" panose="03000509000000000000" pitchFamily="65" charset="-120"/>
+                <a:ea typeface="標楷體" panose="03000509000000000000" pitchFamily="65" charset="-120"/>
+              </a:rPr>
+              <a:t>Anaconda,A-100(Linux), VS Code, </a:t>
+            </a:r>
+            <a:r>
+              <a:rPr lang="en-US" altLang="zh-TW" dirty="0" err="1" smtClean="0">
+                <a:latin typeface="標楷體" panose="03000509000000000000" pitchFamily="65" charset="-120"/>
+                <a:ea typeface="標楷體" panose="03000509000000000000" pitchFamily="65" charset="-120"/>
+              </a:rPr>
+              <a:t>YoLo、U-Net</a:t>
+            </a:r>
+            <a:endParaRPr lang="en-US" altLang="zh-TW" dirty="0" smtClean="0">
+              <a:latin typeface="標楷體" panose="03000509000000000000" pitchFamily="65" charset="-120"/>
+              <a:ea typeface="標楷體" panose="03000509000000000000" pitchFamily="65" charset="-120"/>
+            </a:endParaRPr>
+          </a:p>
+          <a:p>
+            <a:pPr lvl="1"/>
             <a:endParaRPr lang="en-US" altLang="zh-TW" dirty="0">
               <a:latin typeface="標楷體" panose="03000509000000000000" pitchFamily="65" charset="-120"/>
               <a:ea typeface="標楷體" panose="03000509000000000000" pitchFamily="65" charset="-120"/>
@@ -7037,14 +7120,14 @@
           </a:p>
           <a:p>
             <a:r>
-              <a:rPr lang="zh-TW" altLang="en-US" dirty="0" smtClean="0">
+              <a:rPr lang="en-US" altLang="zh-TW" dirty="0">
                 <a:solidFill>
                   <a:srgbClr val="0000FF"/>
                 </a:solidFill>
                 <a:latin typeface="標楷體" panose="03000509000000000000" pitchFamily="65" charset="-120"/>
                 <a:ea typeface="標楷體" panose="03000509000000000000" pitchFamily="65" charset="-120"/>
               </a:rPr>
-              <a:t>四</a:t>
+              <a:t>B</a:t>
             </a:r>
             <a:r>
               <a:rPr lang="en-US" altLang="zh-TW" dirty="0" smtClean="0">
@@ -7230,17 +7313,27 @@
                 <a:latin typeface="標楷體" panose="03000509000000000000" pitchFamily="65" charset="-120"/>
                 <a:ea typeface="標楷體" panose="03000509000000000000" pitchFamily="65" charset="-120"/>
               </a:rPr>
-              <a:t>上網蒐</a:t>
-            </a:r>
-            <a:r>
-              <a:rPr lang="zh-TW" altLang="en-US" dirty="0" smtClean="0">
+              <a:t>上網蒐尋</a:t>
+            </a:r>
+            <a:r>
+              <a:rPr lang="en-US" altLang="zh-TW" dirty="0" smtClean="0">
                 <a:solidFill>
                   <a:srgbClr val="FF0000"/>
                 </a:solidFill>
                 <a:latin typeface="標楷體" panose="03000509000000000000" pitchFamily="65" charset="-120"/>
                 <a:ea typeface="標楷體" panose="03000509000000000000" pitchFamily="65" charset="-120"/>
               </a:rPr>
-              <a:t>尋</a:t>
+              <a:t>:</a:t>
+            </a:r>
+            <a:r>
+              <a:rPr lang="zh-TW" altLang="en-US" dirty="0" smtClean="0">
+                <a:solidFill>
+                  <a:srgbClr val="FF0000"/>
+                </a:solidFill>
+                <a:latin typeface="標楷體" panose="03000509000000000000" pitchFamily="65" charset="-120"/>
+                <a:ea typeface="標楷體" panose="03000509000000000000" pitchFamily="65" charset="-120"/>
+              </a:rPr>
+              <a:t>有興趣的</a:t>
             </a:r>
             <a:r>
               <a:rPr lang="en-US" altLang="zh-TW" dirty="0" smtClean="0">
@@ -7250,7 +7343,7 @@
                 <a:latin typeface="標楷體" panose="03000509000000000000" pitchFamily="65" charset="-120"/>
                 <a:ea typeface="標楷體" panose="03000509000000000000" pitchFamily="65" charset="-120"/>
               </a:rPr>
-              <a:t>:</a:t>
+              <a:t>/</a:t>
             </a:r>
             <a:r>
               <a:rPr lang="zh-TW" altLang="en-US" dirty="0" smtClean="0">
@@ -7260,7 +7353,7 @@
                 <a:latin typeface="標楷體" panose="03000509000000000000" pitchFamily="65" charset="-120"/>
                 <a:ea typeface="標楷體" panose="03000509000000000000" pitchFamily="65" charset="-120"/>
               </a:rPr>
-              <a:t>有興趣的</a:t>
+              <a:t>不懂的</a:t>
             </a:r>
             <a:r>
               <a:rPr lang="en-US" altLang="zh-TW" dirty="0" smtClean="0">
@@ -7280,7 +7373,7 @@
                 <a:latin typeface="標楷體" panose="03000509000000000000" pitchFamily="65" charset="-120"/>
                 <a:ea typeface="標楷體" panose="03000509000000000000" pitchFamily="65" charset="-120"/>
               </a:rPr>
-              <a:t>不懂的</a:t>
+              <a:t>相關技術</a:t>
             </a:r>
             <a:r>
               <a:rPr lang="en-US" altLang="zh-TW" dirty="0" smtClean="0">
@@ -7300,7 +7393,7 @@
                 <a:latin typeface="標楷體" panose="03000509000000000000" pitchFamily="65" charset="-120"/>
                 <a:ea typeface="標楷體" panose="03000509000000000000" pitchFamily="65" charset="-120"/>
               </a:rPr>
-              <a:t>相關技術</a:t>
+              <a:t>資料</a:t>
             </a:r>
             <a:r>
               <a:rPr lang="en-US" altLang="zh-TW" dirty="0" smtClean="0">
@@ -7320,37 +7413,7 @@
                 <a:latin typeface="標楷體" panose="03000509000000000000" pitchFamily="65" charset="-120"/>
                 <a:ea typeface="標楷體" panose="03000509000000000000" pitchFamily="65" charset="-120"/>
               </a:rPr>
-              <a:t>資料</a:t>
-            </a:r>
-            <a:r>
-              <a:rPr lang="en-US" altLang="zh-TW" dirty="0" smtClean="0">
-                <a:solidFill>
-                  <a:srgbClr val="FF0000"/>
-                </a:solidFill>
-                <a:latin typeface="標楷體" panose="03000509000000000000" pitchFamily="65" charset="-120"/>
-                <a:ea typeface="標楷體" panose="03000509000000000000" pitchFamily="65" charset="-120"/>
-              </a:rPr>
-              <a:t>/</a:t>
-            </a:r>
-            <a:r>
-              <a:rPr lang="zh-TW" altLang="en-US" dirty="0" smtClean="0">
-                <a:solidFill>
-                  <a:srgbClr val="FF0000"/>
-                </a:solidFill>
-                <a:latin typeface="標楷體" panose="03000509000000000000" pitchFamily="65" charset="-120"/>
-                <a:ea typeface="標楷體" panose="03000509000000000000" pitchFamily="65" charset="-120"/>
-              </a:rPr>
-              <a:t>網頁</a:t>
-            </a:r>
-            <a:r>
-              <a:rPr lang="zh-TW" altLang="en-US" dirty="0" smtClean="0">
-                <a:solidFill>
-                  <a:srgbClr val="FF0000"/>
-                </a:solidFill>
-                <a:latin typeface="標楷體" panose="03000509000000000000" pitchFamily="65" charset="-120"/>
-                <a:ea typeface="標楷體" panose="03000509000000000000" pitchFamily="65" charset="-120"/>
-              </a:rPr>
-              <a:t>文章</a:t>
+              <a:t>網頁文章</a:t>
             </a:r>
             <a:endParaRPr lang="en-US" altLang="zh-TW" dirty="0" smtClean="0">
               <a:solidFill>
@@ -7439,34 +7502,24 @@
           </a:p>
           <a:p>
             <a:r>
-              <a:rPr lang="zh-TW" altLang="en-US" dirty="0" smtClean="0">
+              <a:rPr lang="en-US" altLang="zh-TW" dirty="0" err="1">
                 <a:solidFill>
                   <a:srgbClr val="0000FF"/>
                 </a:solidFill>
                 <a:latin typeface="標楷體" panose="03000509000000000000" pitchFamily="65" charset="-120"/>
                 <a:ea typeface="標楷體" panose="03000509000000000000" pitchFamily="65" charset="-120"/>
               </a:rPr>
-              <a:t>五</a:t>
-            </a:r>
-            <a:r>
-              <a:rPr lang="en-US" altLang="zh-TW" dirty="0" smtClean="0">
+              <a:t>C</a:t>
+            </a:r>
+            <a:r>
+              <a:rPr lang="en-US" altLang="zh-TW" dirty="0" err="1" smtClean="0">
                 <a:solidFill>
                   <a:srgbClr val="0000FF"/>
                 </a:solidFill>
                 <a:latin typeface="標楷體" panose="03000509000000000000" pitchFamily="65" charset="-120"/>
                 <a:ea typeface="標楷體" panose="03000509000000000000" pitchFamily="65" charset="-120"/>
               </a:rPr>
-              <a:t>.</a:t>
-            </a:r>
-            <a:r>
-              <a:rPr lang="en-US" altLang="zh-TW" dirty="0" err="1" smtClean="0">
-                <a:solidFill>
-                  <a:srgbClr val="0000FF"/>
-                </a:solidFill>
-                <a:latin typeface="標楷體" panose="03000509000000000000" pitchFamily="65" charset="-120"/>
-                <a:ea typeface="標楷體" panose="03000509000000000000" pitchFamily="65" charset="-120"/>
-              </a:rPr>
-              <a:t>Ewant</a:t>
+              <a:t>.Ewant</a:t>
             </a:r>
             <a:r>
               <a:rPr lang="zh-TW" altLang="en-US" dirty="0" smtClean="0">
@@ -8151,14 +8204,7 @@
                 <a:latin typeface="標楷體" panose="03000509000000000000" pitchFamily="65" charset="-120"/>
                 <a:ea typeface="標楷體" panose="03000509000000000000" pitchFamily="65" charset="-120"/>
               </a:rPr>
-              <a:t>找</a:t>
-            </a:r>
-            <a:r>
-              <a:rPr lang="zh-TW" altLang="en-US" dirty="0" smtClean="0">
-                <a:latin typeface="標楷體" panose="03000509000000000000" pitchFamily="65" charset="-120"/>
-                <a:ea typeface="標楷體" panose="03000509000000000000" pitchFamily="65" charset="-120"/>
-              </a:rPr>
-              <a:t>資料</a:t>
+              <a:t>找資料</a:t>
             </a:r>
             <a:r>
               <a:rPr lang="zh-TW" altLang="en-US" dirty="0">

--- a/第一週_AI.課堂規定及評量標準.pptx
+++ b/第一週_AI.課堂規定及評量標準.pptx
@@ -204,7 +204,7 @@
           <a:p>
             <a:fld id="{31A8676C-D457-4A0B-9C91-83939419494E}" type="datetimeFigureOut">
               <a:rPr lang="zh-TW" altLang="en-US" smtClean="0"/>
-              <a:t>2025/9/12</a:t>
+              <a:t>2026/8/24</a:t>
             </a:fld>
             <a:endParaRPr lang="zh-TW" altLang="en-US"/>
           </a:p>
@@ -692,7 +692,7 @@
           <a:p>
             <a:fld id="{6930F9A4-4469-4216-8732-74830AAB3356}" type="datetimeFigureOut">
               <a:rPr lang="zh-TW" altLang="en-US" smtClean="0"/>
-              <a:t>2025/9/12</a:t>
+              <a:t>2026/8/24</a:t>
             </a:fld>
             <a:endParaRPr lang="zh-TW" altLang="en-US"/>
           </a:p>
@@ -862,7 +862,7 @@
           <a:p>
             <a:fld id="{6930F9A4-4469-4216-8732-74830AAB3356}" type="datetimeFigureOut">
               <a:rPr lang="zh-TW" altLang="en-US" smtClean="0"/>
-              <a:t>2025/9/12</a:t>
+              <a:t>2026/8/24</a:t>
             </a:fld>
             <a:endParaRPr lang="zh-TW" altLang="en-US"/>
           </a:p>
@@ -1042,7 +1042,7 @@
           <a:p>
             <a:fld id="{6930F9A4-4469-4216-8732-74830AAB3356}" type="datetimeFigureOut">
               <a:rPr lang="zh-TW" altLang="en-US" smtClean="0"/>
-              <a:t>2025/9/12</a:t>
+              <a:t>2026/8/24</a:t>
             </a:fld>
             <a:endParaRPr lang="zh-TW" altLang="en-US"/>
           </a:p>
@@ -1212,7 +1212,7 @@
           <a:p>
             <a:fld id="{6930F9A4-4469-4216-8732-74830AAB3356}" type="datetimeFigureOut">
               <a:rPr lang="zh-TW" altLang="en-US" smtClean="0"/>
-              <a:t>2025/9/12</a:t>
+              <a:t>2026/8/24</a:t>
             </a:fld>
             <a:endParaRPr lang="zh-TW" altLang="en-US"/>
           </a:p>
@@ -1458,7 +1458,7 @@
           <a:p>
             <a:fld id="{6930F9A4-4469-4216-8732-74830AAB3356}" type="datetimeFigureOut">
               <a:rPr lang="zh-TW" altLang="en-US" smtClean="0"/>
-              <a:t>2025/9/12</a:t>
+              <a:t>2026/8/24</a:t>
             </a:fld>
             <a:endParaRPr lang="zh-TW" altLang="en-US"/>
           </a:p>
@@ -1690,7 +1690,7 @@
           <a:p>
             <a:fld id="{6930F9A4-4469-4216-8732-74830AAB3356}" type="datetimeFigureOut">
               <a:rPr lang="zh-TW" altLang="en-US" smtClean="0"/>
-              <a:t>2025/9/12</a:t>
+              <a:t>2026/8/24</a:t>
             </a:fld>
             <a:endParaRPr lang="zh-TW" altLang="en-US"/>
           </a:p>
@@ -2057,7 +2057,7 @@
           <a:p>
             <a:fld id="{6930F9A4-4469-4216-8732-74830AAB3356}" type="datetimeFigureOut">
               <a:rPr lang="zh-TW" altLang="en-US" smtClean="0"/>
-              <a:t>2025/9/12</a:t>
+              <a:t>2026/8/24</a:t>
             </a:fld>
             <a:endParaRPr lang="zh-TW" altLang="en-US"/>
           </a:p>
@@ -2175,7 +2175,7 @@
           <a:p>
             <a:fld id="{6930F9A4-4469-4216-8732-74830AAB3356}" type="datetimeFigureOut">
               <a:rPr lang="zh-TW" altLang="en-US" smtClean="0"/>
-              <a:t>2025/9/12</a:t>
+              <a:t>2026/8/24</a:t>
             </a:fld>
             <a:endParaRPr lang="zh-TW" altLang="en-US"/>
           </a:p>
@@ -2270,7 +2270,7 @@
           <a:p>
             <a:fld id="{6930F9A4-4469-4216-8732-74830AAB3356}" type="datetimeFigureOut">
               <a:rPr lang="zh-TW" altLang="en-US" smtClean="0"/>
-              <a:t>2025/9/12</a:t>
+              <a:t>2026/8/24</a:t>
             </a:fld>
             <a:endParaRPr lang="zh-TW" altLang="en-US"/>
           </a:p>
@@ -2547,7 +2547,7 @@
           <a:p>
             <a:fld id="{6930F9A4-4469-4216-8732-74830AAB3356}" type="datetimeFigureOut">
               <a:rPr lang="zh-TW" altLang="en-US" smtClean="0"/>
-              <a:t>2025/9/12</a:t>
+              <a:t>2026/8/24</a:t>
             </a:fld>
             <a:endParaRPr lang="zh-TW" altLang="en-US"/>
           </a:p>
@@ -2800,7 +2800,7 @@
           <a:p>
             <a:fld id="{6930F9A4-4469-4216-8732-74830AAB3356}" type="datetimeFigureOut">
               <a:rPr lang="zh-TW" altLang="en-US" smtClean="0"/>
-              <a:t>2025/9/12</a:t>
+              <a:t>2026/8/24</a:t>
             </a:fld>
             <a:endParaRPr lang="zh-TW" altLang="en-US"/>
           </a:p>
@@ -3013,7 +3013,7 @@
           <a:p>
             <a:fld id="{6930F9A4-4469-4216-8732-74830AAB3356}" type="datetimeFigureOut">
               <a:rPr lang="zh-TW" altLang="en-US" smtClean="0"/>
-              <a:t>2025/9/12</a:t>
+              <a:t>2026/8/24</a:t>
             </a:fld>
             <a:endParaRPr lang="zh-TW" altLang="en-US"/>
           </a:p>
@@ -3533,7 +3533,7 @@
                 <a:latin typeface="標楷體" panose="03000509000000000000" pitchFamily="65" charset="-120"/>
                 <a:ea typeface="標楷體" panose="03000509000000000000" pitchFamily="65" charset="-120"/>
               </a:rPr>
-              <a:t>114</a:t>
+              <a:t>115</a:t>
             </a:r>
             <a:r>
               <a:rPr lang="zh-TW" altLang="en-US" sz="2800" dirty="0" smtClean="0">
@@ -3543,7 +3543,17 @@
                 <a:latin typeface="標楷體" panose="03000509000000000000" pitchFamily="65" charset="-120"/>
                 <a:ea typeface="標楷體" panose="03000509000000000000" pitchFamily="65" charset="-120"/>
               </a:rPr>
-              <a:t>學年上學期</a:t>
+              <a:t>學年</a:t>
+            </a:r>
+            <a:r>
+              <a:rPr lang="zh-TW" altLang="en-US" sz="2800" dirty="0" smtClean="0">
+                <a:solidFill>
+                  <a:srgbClr val="FF0000"/>
+                </a:solidFill>
+                <a:latin typeface="標楷體" panose="03000509000000000000" pitchFamily="65" charset="-120"/>
+                <a:ea typeface="標楷體" panose="03000509000000000000" pitchFamily="65" charset="-120"/>
+              </a:rPr>
+              <a:t>上學期</a:t>
             </a:r>
             <a:r>
               <a:rPr lang="en-US" altLang="zh-TW" sz="2800" dirty="0" smtClean="0">
@@ -4202,17 +4212,7 @@
                   <a:latin typeface="標楷體" panose="03000509000000000000" pitchFamily="65" charset="-120"/>
                   <a:ea typeface="標楷體" panose="03000509000000000000" pitchFamily="65" charset="-120"/>
                 </a:rPr>
-                <a:t>實</a:t>
-              </a:r>
-              <a:r>
-                <a:rPr lang="zh-TW" altLang="en-US" sz="2400" dirty="0" smtClean="0">
-                  <a:solidFill>
-                    <a:srgbClr val="FF0000"/>
-                  </a:solidFill>
-                  <a:latin typeface="標楷體" panose="03000509000000000000" pitchFamily="65" charset="-120"/>
-                  <a:ea typeface="標楷體" panose="03000509000000000000" pitchFamily="65" charset="-120"/>
-                </a:rPr>
-                <a:t>作</a:t>
+                <a:t>實作</a:t>
               </a:r>
               <a:r>
                 <a:rPr lang="en-US" altLang="zh-TW" sz="2400" dirty="0" smtClean="0">
@@ -4799,8 +4799,8 @@
         </p:nvSpPr>
         <p:spPr>
           <a:xfrm>
-            <a:off x="838200" y="1533669"/>
-            <a:ext cx="10515600" cy="5224939"/>
+            <a:off x="838199" y="1533669"/>
+            <a:ext cx="10765831" cy="5224939"/>
           </a:xfrm>
         </p:spPr>
         <p:txBody>
@@ -4885,21 +4885,35 @@
                 <a:latin typeface="標楷體" panose="03000509000000000000" pitchFamily="65" charset="-120"/>
                 <a:ea typeface="標楷體" panose="03000509000000000000" pitchFamily="65" charset="-120"/>
               </a:rPr>
-              <a:t>提高自己的價值</a:t>
+              <a:t>提高自己的</a:t>
+            </a:r>
+            <a:r>
+              <a:rPr lang="zh-TW" altLang="en-US" dirty="0" smtClean="0">
+                <a:latin typeface="標楷體" panose="03000509000000000000" pitchFamily="65" charset="-120"/>
+                <a:ea typeface="標楷體" panose="03000509000000000000" pitchFamily="65" charset="-120"/>
+              </a:rPr>
+              <a:t>價值</a:t>
             </a:r>
             <a:r>
               <a:rPr lang="en-US" altLang="zh-TW" dirty="0" smtClean="0">
                 <a:latin typeface="標楷體" panose="03000509000000000000" pitchFamily="65" charset="-120"/>
                 <a:ea typeface="標楷體" panose="03000509000000000000" pitchFamily="65" charset="-120"/>
               </a:rPr>
-              <a:t>-</a:t>
-            </a:r>
-            <a:r>
-              <a:rPr lang="zh-TW" altLang="en-US" dirty="0" smtClean="0">
-                <a:latin typeface="標楷體" panose="03000509000000000000" pitchFamily="65" charset="-120"/>
-                <a:ea typeface="標楷體" panose="03000509000000000000" pitchFamily="65" charset="-120"/>
-              </a:rPr>
-              <a:t>合理的報酬</a:t>
+              <a:t>=</a:t>
+            </a:r>
+            <a:r>
+              <a:rPr lang="zh-TW" altLang="en-US" dirty="0" smtClean="0">
+                <a:latin typeface="標楷體" panose="03000509000000000000" pitchFamily="65" charset="-120"/>
+                <a:ea typeface="標楷體" panose="03000509000000000000" pitchFamily="65" charset="-120"/>
+              </a:rPr>
+              <a:t>合理</a:t>
+            </a:r>
+            <a:r>
+              <a:rPr lang="zh-TW" altLang="en-US" dirty="0" smtClean="0">
+                <a:latin typeface="標楷體" panose="03000509000000000000" pitchFamily="65" charset="-120"/>
+                <a:ea typeface="標楷體" panose="03000509000000000000" pitchFamily="65" charset="-120"/>
+              </a:rPr>
+              <a:t>的報酬</a:t>
             </a:r>
             <a:endParaRPr lang="en-US" altLang="zh-TW" dirty="0" smtClean="0">
               <a:latin typeface="標楷體" panose="03000509000000000000" pitchFamily="65" charset="-120"/>
@@ -5058,17 +5072,17 @@
             <a:r>
               <a:rPr lang="zh-TW" altLang="en-US" dirty="0" smtClean="0">
                 <a:solidFill>
-                  <a:srgbClr val="0000FF"/>
-                </a:solidFill>
-                <a:latin typeface="標楷體" panose="03000509000000000000" pitchFamily="65" charset="-120"/>
-                <a:ea typeface="標楷體" panose="03000509000000000000" pitchFamily="65" charset="-120"/>
-              </a:rPr>
-              <a:t>主動找資料</a:t>
-            </a:r>
-            <a:r>
-              <a:rPr lang="zh-TW" altLang="en-US" dirty="0" smtClean="0">
-                <a:solidFill>
-                  <a:srgbClr val="0000FF"/>
+                  <a:srgbClr val="FF0000"/>
+                </a:solidFill>
+                <a:latin typeface="標楷體" panose="03000509000000000000" pitchFamily="65" charset="-120"/>
+                <a:ea typeface="標楷體" panose="03000509000000000000" pitchFamily="65" charset="-120"/>
+              </a:rPr>
+              <a:t>觀察</a:t>
+            </a:r>
+            <a:r>
+              <a:rPr lang="zh-TW" altLang="en-US" dirty="0">
+                <a:solidFill>
+                  <a:srgbClr val="FF0000"/>
                 </a:solidFill>
                 <a:latin typeface="PMingLiU" panose="02020500000000000000" pitchFamily="18" charset="-120"/>
                 <a:ea typeface="PMingLiU" panose="02020500000000000000" pitchFamily="18" charset="-120"/>
@@ -5078,17 +5092,17 @@
             <a:r>
               <a:rPr lang="zh-TW" altLang="en-US" dirty="0" smtClean="0">
                 <a:solidFill>
-                  <a:srgbClr val="0000FF"/>
-                </a:solidFill>
-                <a:latin typeface="標楷體" panose="03000509000000000000" pitchFamily="65" charset="-120"/>
-                <a:ea typeface="標楷體" panose="03000509000000000000" pitchFamily="65" charset="-120"/>
-              </a:rPr>
-              <a:t>積極找資源</a:t>
-            </a:r>
-            <a:r>
-              <a:rPr lang="zh-TW" altLang="en-US" dirty="0" smtClean="0">
-                <a:solidFill>
-                  <a:srgbClr val="0000FF"/>
+                  <a:srgbClr val="FF0000"/>
+                </a:solidFill>
+                <a:latin typeface="標楷體" panose="03000509000000000000" pitchFamily="65" charset="-120"/>
+                <a:ea typeface="標楷體" panose="03000509000000000000" pitchFamily="65" charset="-120"/>
+              </a:rPr>
+              <a:t>冥想</a:t>
+            </a:r>
+            <a:r>
+              <a:rPr lang="zh-TW" altLang="en-US" dirty="0">
+                <a:solidFill>
+                  <a:srgbClr val="FF0000"/>
                 </a:solidFill>
                 <a:latin typeface="PMingLiU" panose="02020500000000000000" pitchFamily="18" charset="-120"/>
                 <a:ea typeface="PMingLiU" panose="02020500000000000000" pitchFamily="18" charset="-120"/>
@@ -5098,17 +5112,17 @@
             <a:r>
               <a:rPr lang="zh-TW" altLang="en-US" dirty="0" smtClean="0">
                 <a:solidFill>
-                  <a:srgbClr val="0000FF"/>
-                </a:solidFill>
-                <a:latin typeface="標楷體" panose="03000509000000000000" pitchFamily="65" charset="-120"/>
-                <a:ea typeface="標楷體" panose="03000509000000000000" pitchFamily="65" charset="-120"/>
-              </a:rPr>
-              <a:t>工具</a:t>
+                  <a:srgbClr val="FF0000"/>
+                </a:solidFill>
+                <a:latin typeface="標楷體" panose="03000509000000000000" pitchFamily="65" charset="-120"/>
+                <a:ea typeface="標楷體" panose="03000509000000000000" pitchFamily="65" charset="-120"/>
+              </a:rPr>
+              <a:t>發想</a:t>
             </a:r>
             <a:r>
               <a:rPr lang="zh-TW" altLang="en-US" dirty="0">
                 <a:solidFill>
-                  <a:srgbClr val="0000FF"/>
+                  <a:srgbClr val="FF0000"/>
                 </a:solidFill>
                 <a:latin typeface="PMingLiU" panose="02020500000000000000" pitchFamily="18" charset="-120"/>
                 <a:ea typeface="PMingLiU" panose="02020500000000000000" pitchFamily="18" charset="-120"/>
@@ -5118,7 +5132,107 @@
             <a:r>
               <a:rPr lang="zh-TW" altLang="en-US" dirty="0" smtClean="0">
                 <a:solidFill>
-                  <a:srgbClr val="0000FF"/>
+                  <a:srgbClr val="FF0000"/>
+                </a:solidFill>
+                <a:latin typeface="標楷體" panose="03000509000000000000" pitchFamily="65" charset="-120"/>
+                <a:ea typeface="標楷體" panose="03000509000000000000" pitchFamily="65" charset="-120"/>
+              </a:rPr>
+              <a:t>主動找答</a:t>
+            </a:r>
+            <a:r>
+              <a:rPr lang="zh-TW" altLang="en-US" dirty="0" smtClean="0">
+                <a:solidFill>
+                  <a:srgbClr val="FF0000"/>
+                </a:solidFill>
+                <a:latin typeface="標楷體" panose="03000509000000000000" pitchFamily="65" charset="-120"/>
+                <a:ea typeface="標楷體" panose="03000509000000000000" pitchFamily="65" charset="-120"/>
+              </a:rPr>
+              <a:t>案</a:t>
+            </a:r>
+            <a:r>
+              <a:rPr lang="en-US" altLang="zh-TW" dirty="0" smtClean="0">
+                <a:solidFill>
+                  <a:srgbClr val="FF0000"/>
+                </a:solidFill>
+                <a:latin typeface="標楷體" panose="03000509000000000000" pitchFamily="65" charset="-120"/>
+                <a:ea typeface="標楷體" panose="03000509000000000000" pitchFamily="65" charset="-120"/>
+              </a:rPr>
+              <a:t>;</a:t>
+            </a:r>
+            <a:r>
+              <a:rPr lang="zh-TW" altLang="en-US" dirty="0" smtClean="0">
+                <a:solidFill>
+                  <a:srgbClr val="FF0000"/>
+                </a:solidFill>
+                <a:latin typeface="標楷體" panose="03000509000000000000" pitchFamily="65" charset="-120"/>
+                <a:ea typeface="標楷體" panose="03000509000000000000" pitchFamily="65" charset="-120"/>
+              </a:rPr>
+              <a:t>積極找</a:t>
+            </a:r>
+            <a:r>
+              <a:rPr lang="zh-TW" altLang="en-US" dirty="0" smtClean="0">
+                <a:solidFill>
+                  <a:srgbClr val="FF0000"/>
+                </a:solidFill>
+                <a:latin typeface="標楷體" panose="03000509000000000000" pitchFamily="65" charset="-120"/>
+                <a:ea typeface="標楷體" panose="03000509000000000000" pitchFamily="65" charset="-120"/>
+              </a:rPr>
+              <a:t>題目</a:t>
+            </a:r>
+            <a:r>
+              <a:rPr lang="zh-TW" altLang="en-US" dirty="0">
+                <a:solidFill>
+                  <a:srgbClr val="FF0000"/>
+                </a:solidFill>
+                <a:latin typeface="PMingLiU" panose="02020500000000000000" pitchFamily="18" charset="-120"/>
+                <a:ea typeface="PMingLiU" panose="02020500000000000000" pitchFamily="18" charset="-120"/>
+              </a:rPr>
+              <a:t>、</a:t>
+            </a:r>
+            <a:r>
+              <a:rPr lang="zh-TW" altLang="en-US" dirty="0" smtClean="0">
+                <a:solidFill>
+                  <a:srgbClr val="FF0000"/>
+                </a:solidFill>
+                <a:latin typeface="標楷體" panose="03000509000000000000" pitchFamily="65" charset="-120"/>
+                <a:ea typeface="標楷體" panose="03000509000000000000" pitchFamily="65" charset="-120"/>
+              </a:rPr>
+              <a:t>資源</a:t>
+            </a:r>
+            <a:r>
+              <a:rPr lang="zh-TW" altLang="en-US" dirty="0" smtClean="0">
+                <a:solidFill>
+                  <a:srgbClr val="FF0000"/>
+                </a:solidFill>
+                <a:latin typeface="PMingLiU" panose="02020500000000000000" pitchFamily="18" charset="-120"/>
+                <a:ea typeface="PMingLiU" panose="02020500000000000000" pitchFamily="18" charset="-120"/>
+              </a:rPr>
+              <a:t>、</a:t>
+            </a:r>
+            <a:r>
+              <a:rPr lang="zh-TW" altLang="en-US" dirty="0" smtClean="0">
+                <a:solidFill>
+                  <a:srgbClr val="FF0000"/>
+                </a:solidFill>
+                <a:latin typeface="標楷體" panose="03000509000000000000" pitchFamily="65" charset="-120"/>
+                <a:ea typeface="標楷體" panose="03000509000000000000" pitchFamily="65" charset="-120"/>
+              </a:rPr>
+              <a:t>工具</a:t>
+            </a:r>
+            <a:r>
+              <a:rPr lang="zh-TW" altLang="en-US" dirty="0">
+                <a:solidFill>
+                  <a:srgbClr val="FF0000"/>
+                </a:solidFill>
+                <a:latin typeface="PMingLiU" panose="02020500000000000000" pitchFamily="18" charset="-120"/>
+                <a:ea typeface="PMingLiU" panose="02020500000000000000" pitchFamily="18" charset="-120"/>
+              </a:rPr>
+              <a:t>、</a:t>
+            </a:r>
+            <a:r>
+              <a:rPr lang="zh-TW" altLang="en-US" dirty="0" smtClean="0">
+                <a:solidFill>
+                  <a:srgbClr val="FF0000"/>
                 </a:solidFill>
                 <a:latin typeface="標楷體" panose="03000509000000000000" pitchFamily="65" charset="-120"/>
                 <a:ea typeface="標楷體" panose="03000509000000000000" pitchFamily="65" charset="-120"/>
@@ -5127,7 +5241,7 @@
             </a:r>
             <a:endParaRPr lang="en-US" altLang="zh-TW" dirty="0" smtClean="0">
               <a:solidFill>
-                <a:srgbClr val="0000FF"/>
+                <a:srgbClr val="FF0000"/>
               </a:solidFill>
               <a:latin typeface="標楷體" panose="03000509000000000000" pitchFamily="65" charset="-120"/>
               <a:ea typeface="標楷體" panose="03000509000000000000" pitchFamily="65" charset="-120"/>
@@ -7083,14 +7197,7 @@
                 <a:latin typeface="標楷體" panose="03000509000000000000" pitchFamily="65" charset="-120"/>
                 <a:ea typeface="標楷體" panose="03000509000000000000" pitchFamily="65" charset="-120"/>
               </a:rPr>
-              <a:t>Windows +</a:t>
-            </a:r>
-            <a:r>
-              <a:rPr lang="en-US" altLang="zh-TW" dirty="0">
-                <a:latin typeface="標楷體" panose="03000509000000000000" pitchFamily="65" charset="-120"/>
-                <a:ea typeface="標楷體" panose="03000509000000000000" pitchFamily="65" charset="-120"/>
-              </a:rPr>
-              <a:t> </a:t>
+              <a:t>Windows + </a:t>
             </a:r>
             <a:r>
               <a:rPr lang="en-US" altLang="zh-TW" dirty="0" smtClean="0">
